--- a/slides/3_alternatives.pptx
+++ b/slides/3_alternatives.pptx
@@ -9,12 +9,12 @@
   </p:notesMasterIdLst>
   <p:sldIdLst>
     <p:sldId id="256" r:id="rId2"/>
-    <p:sldId id="267" r:id="rId3"/>
-    <p:sldId id="266" r:id="rId4"/>
-    <p:sldId id="270" r:id="rId5"/>
-    <p:sldId id="567" r:id="rId6"/>
-    <p:sldId id="565" r:id="rId7"/>
-    <p:sldId id="568" r:id="rId8"/>
+    <p:sldId id="266" r:id="rId3"/>
+    <p:sldId id="270" r:id="rId4"/>
+    <p:sldId id="567" r:id="rId5"/>
+    <p:sldId id="565" r:id="rId6"/>
+    <p:sldId id="568" r:id="rId7"/>
+    <p:sldId id="853" r:id="rId8"/>
   </p:sldIdLst>
   <p:sldSz cx="12192000" cy="6858000"/>
   <p:notesSz cx="6858000" cy="9144000"/>
@@ -485,7 +485,7 @@
           <a:p>
             <a:fld id="{506E0FD1-891F-4B1E-916D-E9B585160BB8}" type="datetimeFigureOut">
               <a:rPr lang="en-GB" smtClean="0"/>
-              <a:t>26/01/2026</a:t>
+              <a:t>03/03/2026</a:t>
             </a:fld>
             <a:endParaRPr lang="en-GB"/>
           </a:p>
@@ -902,7 +902,7 @@
           <a:p>
             <a:fld id="{D68C3F22-27B2-44E3-9C5F-D08126455F6F}" type="datetime1">
               <a:rPr lang="en-GB" smtClean="0"/>
-              <a:t>26/01/2026</a:t>
+              <a:t>03/03/2026</a:t>
             </a:fld>
             <a:endParaRPr lang="en-GB"/>
           </a:p>
@@ -1102,7 +1102,7 @@
           <a:p>
             <a:fld id="{1CD03846-7BF6-4FB6-A921-FF3379ADBD4C}" type="datetime1">
               <a:rPr lang="en-GB" smtClean="0"/>
-              <a:t>26/01/2026</a:t>
+              <a:t>03/03/2026</a:t>
             </a:fld>
             <a:endParaRPr lang="en-GB"/>
           </a:p>
@@ -1312,7 +1312,7 @@
           <a:p>
             <a:fld id="{99E1B91A-3FD0-4144-9C84-63E9688ED2FE}" type="datetime1">
               <a:rPr lang="en-GB" smtClean="0"/>
-              <a:t>26/01/2026</a:t>
+              <a:t>03/03/2026</a:t>
             </a:fld>
             <a:endParaRPr lang="en-GB"/>
           </a:p>
@@ -1512,7 +1512,7 @@
           <a:p>
             <a:fld id="{5295ED7B-FEAD-4734-819F-93EF4B0EA908}" type="datetime1">
               <a:rPr lang="en-GB" smtClean="0"/>
-              <a:t>26/01/2026</a:t>
+              <a:t>03/03/2026</a:t>
             </a:fld>
             <a:endParaRPr lang="en-GB"/>
           </a:p>
@@ -1788,7 +1788,7 @@
           <a:p>
             <a:fld id="{D2D5D4B4-C926-4B45-8815-1ED8911179A2}" type="datetime1">
               <a:rPr lang="en-GB" smtClean="0"/>
-              <a:t>26/01/2026</a:t>
+              <a:t>03/03/2026</a:t>
             </a:fld>
             <a:endParaRPr lang="en-GB"/>
           </a:p>
@@ -2056,7 +2056,7 @@
           <a:p>
             <a:fld id="{B4C5210A-0E37-4935-93AF-69F21A5F712F}" type="datetime1">
               <a:rPr lang="en-GB" smtClean="0"/>
-              <a:t>26/01/2026</a:t>
+              <a:t>03/03/2026</a:t>
             </a:fld>
             <a:endParaRPr lang="en-GB"/>
           </a:p>
@@ -2471,7 +2471,7 @@
           <a:p>
             <a:fld id="{3D3A6B2F-436C-4691-80E8-9C890E000E9D}" type="datetime1">
               <a:rPr lang="en-GB" smtClean="0"/>
-              <a:t>26/01/2026</a:t>
+              <a:t>03/03/2026</a:t>
             </a:fld>
             <a:endParaRPr lang="en-GB"/>
           </a:p>
@@ -2613,7 +2613,7 @@
           <a:p>
             <a:fld id="{84385F4C-D74B-496F-8D21-97E3549C783B}" type="datetime1">
               <a:rPr lang="en-GB" smtClean="0"/>
-              <a:t>26/01/2026</a:t>
+              <a:t>03/03/2026</a:t>
             </a:fld>
             <a:endParaRPr lang="en-GB"/>
           </a:p>
@@ -2726,7 +2726,7 @@
           <a:p>
             <a:fld id="{0CBDCB32-C241-4703-A832-4EB47BD54E83}" type="datetime1">
               <a:rPr lang="en-GB" smtClean="0"/>
-              <a:t>26/01/2026</a:t>
+              <a:t>03/03/2026</a:t>
             </a:fld>
             <a:endParaRPr lang="en-GB"/>
           </a:p>
@@ -3039,7 +3039,7 @@
           <a:p>
             <a:fld id="{85C150FF-BE95-4D25-A16A-E368A81CBF24}" type="datetime1">
               <a:rPr lang="en-GB" smtClean="0"/>
-              <a:t>26/01/2026</a:t>
+              <a:t>03/03/2026</a:t>
             </a:fld>
             <a:endParaRPr lang="en-GB"/>
           </a:p>
@@ -3328,7 +3328,7 @@
           <a:p>
             <a:fld id="{F3C5DB4B-B349-43C9-A424-BADA723AD9F1}" type="datetime1">
               <a:rPr lang="en-GB" smtClean="0"/>
-              <a:t>26/01/2026</a:t>
+              <a:t>03/03/2026</a:t>
             </a:fld>
             <a:endParaRPr lang="en-GB"/>
           </a:p>
@@ -3571,7 +3571,7 @@
           <a:p>
             <a:fld id="{12632426-0A0C-405F-A3D0-2D11AA44702A}" type="datetime1">
               <a:rPr lang="en-GB" smtClean="0"/>
-              <a:t>26/01/2026</a:t>
+              <a:t>03/03/2026</a:t>
             </a:fld>
             <a:endParaRPr lang="en-GB"/>
           </a:p>
@@ -4016,12 +4016,8 @@
           <a:lstStyle/>
           <a:p>
             <a:r>
-              <a:rPr lang="de-DE" dirty="0" err="1"/>
-              <a:t>Beyond</a:t>
-            </a:r>
-            <a:r>
               <a:rPr lang="de-DE" dirty="0"/>
-              <a:t> Online Model-Free RL</a:t>
+              <a:t>Alternative Methods</a:t>
             </a:r>
           </a:p>
         </p:txBody>
@@ -4086,10 +4082,10 @@
       </p:grpSpPr>
       <p:sp>
         <p:nvSpPr>
-          <p:cNvPr id="4" name="Title 3">
-            <a:extLst>
-              <a:ext uri="{FF2B5EF4-FFF2-40B4-BE49-F238E27FC236}">
-                <a16:creationId xmlns:a16="http://schemas.microsoft.com/office/drawing/2014/main" id="{080AD447-446B-E09E-6F4A-522C1DBB462E}"/>
+          <p:cNvPr id="2" name="Titel 1">
+            <a:extLst>
+              <a:ext uri="{FF2B5EF4-FFF2-40B4-BE49-F238E27FC236}">
+                <a16:creationId xmlns:a16="http://schemas.microsoft.com/office/drawing/2014/main" id="{6B454CE0-BAFB-F9B0-668F-121821B8B29C}"/>
               </a:ext>
             </a:extLst>
           </p:cNvPr>
@@ -4105,180 +4101,6 @@
           <a:bodyPr/>
           <a:lstStyle/>
           <a:p>
-            <a:r>
-              <a:rPr lang="en-GB" dirty="0"/>
-              <a:t>Course Schedule</a:t>
-            </a:r>
-          </a:p>
-        </p:txBody>
-      </p:sp>
-      <p:sp>
-        <p:nvSpPr>
-          <p:cNvPr id="6" name="Inhaltsplatzhalter 5">
-            <a:extLst>
-              <a:ext uri="{FF2B5EF4-FFF2-40B4-BE49-F238E27FC236}">
-                <a16:creationId xmlns:a16="http://schemas.microsoft.com/office/drawing/2014/main" id="{CF502483-E45D-7D7D-D169-ACA4F8327D26}"/>
-              </a:ext>
-            </a:extLst>
-          </p:cNvPr>
-          <p:cNvSpPr>
-            <a:spLocks noGrp="1"/>
-          </p:cNvSpPr>
-          <p:nvPr>
-            <p:ph sz="half" idx="1"/>
-          </p:nvPr>
-        </p:nvSpPr>
-        <p:spPr/>
-        <p:txBody>
-          <a:bodyPr>
-            <a:normAutofit/>
-          </a:bodyPr>
-          <a:lstStyle/>
-          <a:p>
-            <a:pPr marL="514350" indent="-514350">
-              <a:buFont typeface="+mj-lt"/>
-              <a:buAutoNum type="arabicPeriod"/>
-            </a:pPr>
-            <a:r>
-              <a:rPr lang="de-DE" dirty="0"/>
-              <a:t>Foundations</a:t>
-            </a:r>
-          </a:p>
-          <a:p>
-            <a:pPr marL="514350" indent="-514350">
-              <a:buFont typeface="+mj-lt"/>
-              <a:buAutoNum type="arabicPeriod"/>
-            </a:pPr>
-            <a:endParaRPr lang="de-DE" dirty="0"/>
-          </a:p>
-          <a:p>
-            <a:pPr marL="514350" indent="-514350">
-              <a:buFont typeface="+mj-lt"/>
-              <a:buAutoNum type="arabicPeriod"/>
-            </a:pPr>
-            <a:r>
-              <a:rPr lang="de-DE" dirty="0" err="1"/>
-              <a:t>Tabular</a:t>
-            </a:r>
-            <a:r>
-              <a:rPr lang="de-DE" dirty="0"/>
-              <a:t> Methods</a:t>
-            </a:r>
-          </a:p>
-          <a:p>
-            <a:pPr marL="514350" indent="-514350">
-              <a:buFont typeface="+mj-lt"/>
-              <a:buAutoNum type="arabicPeriod"/>
-            </a:pPr>
-            <a:endParaRPr lang="de-DE" dirty="0"/>
-          </a:p>
-          <a:p>
-            <a:pPr marL="514350" indent="-514350">
-              <a:buFont typeface="+mj-lt"/>
-              <a:buAutoNum type="arabicPeriod"/>
-            </a:pPr>
-            <a:r>
-              <a:rPr lang="de-DE" dirty="0" err="1"/>
-              <a:t>Function</a:t>
-            </a:r>
-            <a:r>
-              <a:rPr lang="de-DE" dirty="0"/>
-              <a:t> Approximation</a:t>
-            </a:r>
-          </a:p>
-          <a:p>
-            <a:pPr marL="514350" indent="-514350">
-              <a:buFont typeface="+mj-lt"/>
-              <a:buAutoNum type="arabicPeriod"/>
-            </a:pPr>
-            <a:endParaRPr lang="de-DE" dirty="0"/>
-          </a:p>
-          <a:p>
-            <a:pPr marL="514350" indent="-514350">
-              <a:buFont typeface="+mj-lt"/>
-              <a:buAutoNum type="arabicPeriod"/>
-            </a:pPr>
-            <a:r>
-              <a:rPr lang="de-DE" dirty="0"/>
-              <a:t>Deep Q-Learning</a:t>
-            </a:r>
-          </a:p>
-        </p:txBody>
-      </p:sp>
-      <p:sp>
-        <p:nvSpPr>
-          <p:cNvPr id="7" name="Inhaltsplatzhalter 6">
-            <a:extLst>
-              <a:ext uri="{FF2B5EF4-FFF2-40B4-BE49-F238E27FC236}">
-                <a16:creationId xmlns:a16="http://schemas.microsoft.com/office/drawing/2014/main" id="{B671907E-FFFA-73EF-8E7D-4AB4EBDD957B}"/>
-              </a:ext>
-            </a:extLst>
-          </p:cNvPr>
-          <p:cNvSpPr>
-            <a:spLocks noGrp="1"/>
-          </p:cNvSpPr>
-          <p:nvPr>
-            <p:ph sz="half" idx="2"/>
-          </p:nvPr>
-        </p:nvSpPr>
-        <p:spPr>
-          <a:xfrm>
-            <a:off x="6172199" y="1825625"/>
-            <a:ext cx="5268191" cy="4351338"/>
-          </a:xfrm>
-        </p:spPr>
-        <p:txBody>
-          <a:bodyPr>
-            <a:normAutofit/>
-          </a:bodyPr>
-          <a:lstStyle/>
-          <a:p>
-            <a:pPr marL="514350" indent="-514350">
-              <a:buFont typeface="+mj-lt"/>
-              <a:buAutoNum type="arabicPeriod" startAt="5"/>
-            </a:pPr>
-            <a:r>
-              <a:rPr lang="de-DE" dirty="0"/>
-              <a:t>Policy Gradient Methods</a:t>
-            </a:r>
-          </a:p>
-          <a:p>
-            <a:pPr marL="514350" indent="-514350">
-              <a:buFont typeface="+mj-lt"/>
-              <a:buAutoNum type="arabicPeriod" startAt="5"/>
-            </a:pPr>
-            <a:endParaRPr lang="de-DE" dirty="0"/>
-          </a:p>
-          <a:p>
-            <a:pPr marL="514350" indent="-514350">
-              <a:buFont typeface="+mj-lt"/>
-              <a:buAutoNum type="arabicPeriod" startAt="5"/>
-            </a:pPr>
-            <a:r>
-              <a:rPr lang="de-DE" dirty="0"/>
-              <a:t>Actor-</a:t>
-            </a:r>
-            <a:r>
-              <a:rPr lang="de-DE" dirty="0" err="1"/>
-              <a:t>Critic</a:t>
-            </a:r>
-            <a:r>
-              <a:rPr lang="de-DE" dirty="0"/>
-              <a:t> Methods</a:t>
-            </a:r>
-          </a:p>
-          <a:p>
-            <a:pPr marL="514350" indent="-514350">
-              <a:buFont typeface="+mj-lt"/>
-              <a:buAutoNum type="arabicPeriod" startAt="5"/>
-            </a:pPr>
-            <a:endParaRPr lang="de-DE" dirty="0"/>
-          </a:p>
-          <a:p>
-            <a:pPr marL="514350" indent="-514350">
-              <a:buFont typeface="+mj-lt"/>
-              <a:buAutoNum type="arabicPeriod" startAt="5"/>
-            </a:pPr>
             <a:r>
               <a:rPr lang="de-DE" dirty="0" err="1"/>
               <a:t>Beyond</a:t>
@@ -4288,35 +4110,288 @@
               <a:t> Online Model-Free RL</a:t>
             </a:r>
           </a:p>
-          <a:p>
-            <a:pPr marL="514350" indent="-514350">
-              <a:buFont typeface="+mj-lt"/>
-              <a:buAutoNum type="arabicPeriod" startAt="5"/>
-            </a:pPr>
-            <a:endParaRPr lang="de-DE" dirty="0"/>
-          </a:p>
-          <a:p>
-            <a:pPr marL="514350" indent="-514350">
-              <a:buFont typeface="+mj-lt"/>
-              <a:buAutoNum type="arabicPeriod" startAt="5"/>
-            </a:pPr>
+        </p:txBody>
+      </p:sp>
+      <p:sp>
+        <p:nvSpPr>
+          <p:cNvPr id="3" name="Inhaltsplatzhalter 2">
+            <a:extLst>
+              <a:ext uri="{FF2B5EF4-FFF2-40B4-BE49-F238E27FC236}">
+                <a16:creationId xmlns:a16="http://schemas.microsoft.com/office/drawing/2014/main" id="{7494ABEC-DFA9-E877-8C19-A56BC6A1AA01}"/>
+              </a:ext>
+            </a:extLst>
+          </p:cNvPr>
+          <p:cNvSpPr>
+            <a:spLocks noGrp="1"/>
+          </p:cNvSpPr>
+          <p:nvPr>
+            <p:ph idx="1"/>
+          </p:nvPr>
+        </p:nvSpPr>
+        <p:spPr/>
+        <p:txBody>
+          <a:bodyPr>
+            <a:normAutofit lnSpcReduction="10000"/>
+          </a:bodyPr>
+          <a:lstStyle/>
+          <a:p>
+            <a:r>
+              <a:rPr lang="de-DE" dirty="0"/>
+              <a:t>Model-</a:t>
+            </a:r>
             <a:r>
               <a:rPr lang="de-DE" dirty="0" err="1"/>
-              <a:t>Embodied</a:t>
+              <a:t>based</a:t>
             </a:r>
             <a:r>
               <a:rPr lang="de-DE" dirty="0"/>
               <a:t> RL</a:t>
             </a:r>
           </a:p>
-        </p:txBody>
-      </p:sp>
-      <p:sp>
-        <p:nvSpPr>
-          <p:cNvPr id="3" name="Slide Number Placeholder 2">
-            <a:extLst>
-              <a:ext uri="{FF2B5EF4-FFF2-40B4-BE49-F238E27FC236}">
-                <a16:creationId xmlns:a16="http://schemas.microsoft.com/office/drawing/2014/main" id="{A0664D44-83AC-6A7A-17E0-C1AE2ED18FF5}"/>
+          <a:p>
+            <a:r>
+              <a:rPr lang="de-DE" dirty="0"/>
+              <a:t>Offline RL</a:t>
+            </a:r>
+          </a:p>
+          <a:p>
+            <a:r>
+              <a:rPr lang="de-DE" dirty="0" err="1"/>
+              <a:t>Behavior</a:t>
+            </a:r>
+            <a:r>
+              <a:rPr lang="de-DE" dirty="0"/>
+              <a:t> </a:t>
+            </a:r>
+            <a:r>
+              <a:rPr lang="de-DE" dirty="0" err="1"/>
+              <a:t>cloning</a:t>
+            </a:r>
+            <a:r>
+              <a:rPr lang="de-DE" dirty="0"/>
+              <a:t> &amp; </a:t>
+            </a:r>
+            <a:r>
+              <a:rPr lang="de-DE" dirty="0" err="1"/>
+              <a:t>imitation</a:t>
+            </a:r>
+            <a:r>
+              <a:rPr lang="de-DE" dirty="0"/>
+              <a:t> </a:t>
+            </a:r>
+            <a:r>
+              <a:rPr lang="de-DE" dirty="0" err="1"/>
+              <a:t>learning</a:t>
+            </a:r>
+            <a:endParaRPr lang="de-DE" dirty="0"/>
+          </a:p>
+          <a:p>
+            <a:r>
+              <a:rPr lang="de-DE" dirty="0" err="1"/>
+              <a:t>Sequence</a:t>
+            </a:r>
+            <a:r>
+              <a:rPr lang="de-DE" dirty="0"/>
+              <a:t>/</a:t>
+            </a:r>
+            <a:r>
+              <a:rPr lang="de-DE" dirty="0" err="1"/>
+              <a:t>trajectory</a:t>
+            </a:r>
+            <a:r>
+              <a:rPr lang="de-DE" dirty="0"/>
+              <a:t> </a:t>
+            </a:r>
+            <a:r>
+              <a:rPr lang="de-DE" dirty="0" err="1"/>
+              <a:t>modeling</a:t>
+            </a:r>
+            <a:r>
+              <a:rPr lang="de-DE" dirty="0"/>
+              <a:t> (</a:t>
+            </a:r>
+            <a:r>
+              <a:rPr lang="de-DE" dirty="0" err="1"/>
+              <a:t>Decision</a:t>
+            </a:r>
+            <a:r>
+              <a:rPr lang="de-DE" dirty="0"/>
+              <a:t> Transformer, </a:t>
+            </a:r>
+            <a:r>
+              <a:rPr lang="de-DE" dirty="0" err="1"/>
+              <a:t>diffusion</a:t>
+            </a:r>
+            <a:r>
+              <a:rPr lang="de-DE" dirty="0"/>
+              <a:t> </a:t>
+            </a:r>
+            <a:r>
+              <a:rPr lang="de-DE" dirty="0" err="1"/>
+              <a:t>models</a:t>
+            </a:r>
+            <a:r>
+              <a:rPr lang="de-DE" dirty="0"/>
+              <a:t> </a:t>
+            </a:r>
+            <a:r>
+              <a:rPr lang="de-DE" dirty="0" err="1"/>
+              <a:t>for</a:t>
+            </a:r>
+            <a:r>
+              <a:rPr lang="de-DE" dirty="0"/>
+              <a:t> </a:t>
+            </a:r>
+            <a:r>
+              <a:rPr lang="de-DE" dirty="0" err="1"/>
+              <a:t>policies</a:t>
+            </a:r>
+            <a:r>
+              <a:rPr lang="de-DE" dirty="0"/>
+              <a:t>)</a:t>
+            </a:r>
+          </a:p>
+          <a:p>
+            <a:r>
+              <a:rPr lang="de-DE" dirty="0"/>
+              <a:t>Vision-</a:t>
+            </a:r>
+            <a:r>
+              <a:rPr lang="de-DE" dirty="0" err="1"/>
+              <a:t>language</a:t>
+            </a:r>
+            <a:r>
+              <a:rPr lang="de-DE" dirty="0"/>
+              <a:t>-action </a:t>
+            </a:r>
+            <a:r>
+              <a:rPr lang="de-DE" dirty="0" err="1"/>
+              <a:t>models</a:t>
+            </a:r>
+            <a:endParaRPr lang="de-DE" dirty="0"/>
+          </a:p>
+          <a:p>
+            <a:pPr lvl="1"/>
+            <a:r>
+              <a:rPr lang="de-DE" dirty="0"/>
+              <a:t>Vision </a:t>
+            </a:r>
+            <a:r>
+              <a:rPr lang="de-DE" dirty="0" err="1"/>
+              <a:t>encoders</a:t>
+            </a:r>
+            <a:r>
+              <a:rPr lang="de-DE" dirty="0"/>
+              <a:t> (</a:t>
+            </a:r>
+            <a:r>
+              <a:rPr lang="de-DE" dirty="0" err="1"/>
+              <a:t>ResNet</a:t>
+            </a:r>
+            <a:r>
+              <a:rPr lang="de-DE" dirty="0"/>
+              <a:t>, </a:t>
+            </a:r>
+            <a:r>
+              <a:rPr lang="de-DE" dirty="0" err="1"/>
+              <a:t>ViT</a:t>
+            </a:r>
+            <a:r>
+              <a:rPr lang="de-DE" dirty="0"/>
+              <a:t>)</a:t>
+            </a:r>
+          </a:p>
+          <a:p>
+            <a:pPr lvl="1"/>
+            <a:r>
+              <a:rPr lang="de-DE" dirty="0"/>
+              <a:t>Language </a:t>
+            </a:r>
+            <a:r>
+              <a:rPr lang="de-DE" dirty="0" err="1"/>
+              <a:t>models</a:t>
+            </a:r>
+            <a:r>
+              <a:rPr lang="de-DE" dirty="0"/>
+              <a:t> (</a:t>
+            </a:r>
+            <a:r>
+              <a:rPr lang="de-DE" dirty="0" err="1"/>
+              <a:t>side</a:t>
+            </a:r>
+            <a:r>
+              <a:rPr lang="de-DE" dirty="0"/>
+              <a:t> </a:t>
+            </a:r>
+            <a:r>
+              <a:rPr lang="de-DE" dirty="0" err="1"/>
+              <a:t>note</a:t>
+            </a:r>
+            <a:r>
+              <a:rPr lang="de-DE" dirty="0"/>
+              <a:t>: RLHF </a:t>
+            </a:r>
+            <a:r>
+              <a:rPr lang="de-DE" dirty="0" err="1"/>
+              <a:t>for</a:t>
+            </a:r>
+            <a:r>
+              <a:rPr lang="de-DE" dirty="0"/>
+              <a:t> LLM post-training)</a:t>
+            </a:r>
+          </a:p>
+          <a:p>
+            <a:pPr lvl="1"/>
+            <a:r>
+              <a:rPr lang="de-DE" dirty="0"/>
+              <a:t>Multimodal </a:t>
+            </a:r>
+            <a:r>
+              <a:rPr lang="de-DE" dirty="0" err="1"/>
+              <a:t>fusion</a:t>
+            </a:r>
+            <a:endParaRPr lang="de-DE" dirty="0"/>
+          </a:p>
+          <a:p>
+            <a:pPr lvl="1"/>
+            <a:r>
+              <a:rPr lang="de-DE" dirty="0" err="1"/>
+              <a:t>Tokenization</a:t>
+            </a:r>
+            <a:r>
+              <a:rPr lang="de-DE" dirty="0"/>
+              <a:t> </a:t>
+            </a:r>
+            <a:r>
+              <a:rPr lang="de-DE" dirty="0" err="1"/>
+              <a:t>of</a:t>
+            </a:r>
+            <a:r>
+              <a:rPr lang="de-DE" dirty="0"/>
+              <a:t> </a:t>
+            </a:r>
+            <a:r>
+              <a:rPr lang="de-DE" dirty="0" err="1"/>
+              <a:t>sensorimotor</a:t>
+            </a:r>
+            <a:r>
+              <a:rPr lang="de-DE" dirty="0"/>
+              <a:t> </a:t>
+            </a:r>
+            <a:r>
+              <a:rPr lang="de-DE" dirty="0" err="1"/>
+              <a:t>sequences</a:t>
+            </a:r>
+            <a:endParaRPr lang="de-DE" dirty="0"/>
+          </a:p>
+        </p:txBody>
+      </p:sp>
+      <p:sp>
+        <p:nvSpPr>
+          <p:cNvPr id="4" name="Foliennummernplatzhalter 3">
+            <a:extLst>
+              <a:ext uri="{FF2B5EF4-FFF2-40B4-BE49-F238E27FC236}">
+                <a16:creationId xmlns:a16="http://schemas.microsoft.com/office/drawing/2014/main" id="{C2BA8F83-5EF2-341E-9942-5EE099C574E6}"/>
               </a:ext>
             </a:extLst>
           </p:cNvPr>
@@ -4336,14 +4411,14 @@
               <a:rPr lang="en-GB" smtClean="0"/>
               <a:t>2</a:t>
             </a:fld>
-            <a:endParaRPr lang="en-GB" dirty="0"/>
+            <a:endParaRPr lang="en-GB"/>
           </a:p>
         </p:txBody>
       </p:sp>
     </p:spTree>
     <p:extLst>
       <p:ext uri="{BB962C8B-B14F-4D97-AF65-F5344CB8AC3E}">
-        <p14:creationId xmlns:p14="http://schemas.microsoft.com/office/powerpoint/2010/main" val="1376558971"/>
+        <p14:creationId xmlns:p14="http://schemas.microsoft.com/office/powerpoint/2010/main" val="1960105798"/>
       </p:ext>
     </p:extLst>
   </p:cSld>
@@ -4370,371 +4445,6 @@
           <a:chExt cx="0" cy="0"/>
         </a:xfrm>
       </p:grpSpPr>
-      <p:sp>
-        <p:nvSpPr>
-          <p:cNvPr id="2" name="Titel 1">
-            <a:extLst>
-              <a:ext uri="{FF2B5EF4-FFF2-40B4-BE49-F238E27FC236}">
-                <a16:creationId xmlns:a16="http://schemas.microsoft.com/office/drawing/2014/main" id="{6B454CE0-BAFB-F9B0-668F-121821B8B29C}"/>
-              </a:ext>
-            </a:extLst>
-          </p:cNvPr>
-          <p:cNvSpPr>
-            <a:spLocks noGrp="1"/>
-          </p:cNvSpPr>
-          <p:nvPr>
-            <p:ph type="title"/>
-          </p:nvPr>
-        </p:nvSpPr>
-        <p:spPr/>
-        <p:txBody>
-          <a:bodyPr/>
-          <a:lstStyle/>
-          <a:p>
-            <a:r>
-              <a:rPr lang="de-DE" dirty="0" err="1"/>
-              <a:t>Beyond</a:t>
-            </a:r>
-            <a:r>
-              <a:rPr lang="de-DE" dirty="0"/>
-              <a:t> Online Model-Free RL</a:t>
-            </a:r>
-          </a:p>
-        </p:txBody>
-      </p:sp>
-      <p:sp>
-        <p:nvSpPr>
-          <p:cNvPr id="3" name="Inhaltsplatzhalter 2">
-            <a:extLst>
-              <a:ext uri="{FF2B5EF4-FFF2-40B4-BE49-F238E27FC236}">
-                <a16:creationId xmlns:a16="http://schemas.microsoft.com/office/drawing/2014/main" id="{7494ABEC-DFA9-E877-8C19-A56BC6A1AA01}"/>
-              </a:ext>
-            </a:extLst>
-          </p:cNvPr>
-          <p:cNvSpPr>
-            <a:spLocks noGrp="1"/>
-          </p:cNvSpPr>
-          <p:nvPr>
-            <p:ph idx="1"/>
-          </p:nvPr>
-        </p:nvSpPr>
-        <p:spPr/>
-        <p:txBody>
-          <a:bodyPr>
-            <a:normAutofit lnSpcReduction="10000"/>
-          </a:bodyPr>
-          <a:lstStyle/>
-          <a:p>
-            <a:r>
-              <a:rPr lang="de-DE" dirty="0"/>
-              <a:t>Model-</a:t>
-            </a:r>
-            <a:r>
-              <a:rPr lang="de-DE" dirty="0" err="1"/>
-              <a:t>based</a:t>
-            </a:r>
-            <a:r>
-              <a:rPr lang="de-DE" dirty="0"/>
-              <a:t> RL</a:t>
-            </a:r>
-          </a:p>
-          <a:p>
-            <a:r>
-              <a:rPr lang="de-DE" dirty="0"/>
-              <a:t>Offline RL</a:t>
-            </a:r>
-          </a:p>
-          <a:p>
-            <a:r>
-              <a:rPr lang="de-DE" dirty="0" err="1"/>
-              <a:t>Behavior</a:t>
-            </a:r>
-            <a:r>
-              <a:rPr lang="de-DE" dirty="0"/>
-              <a:t> </a:t>
-            </a:r>
-            <a:r>
-              <a:rPr lang="de-DE" dirty="0" err="1"/>
-              <a:t>cloning</a:t>
-            </a:r>
-            <a:r>
-              <a:rPr lang="de-DE" dirty="0"/>
-              <a:t> &amp; </a:t>
-            </a:r>
-            <a:r>
-              <a:rPr lang="de-DE" dirty="0" err="1"/>
-              <a:t>imitation</a:t>
-            </a:r>
-            <a:r>
-              <a:rPr lang="de-DE" dirty="0"/>
-              <a:t> </a:t>
-            </a:r>
-            <a:r>
-              <a:rPr lang="de-DE" dirty="0" err="1"/>
-              <a:t>learning</a:t>
-            </a:r>
-            <a:endParaRPr lang="de-DE" dirty="0"/>
-          </a:p>
-          <a:p>
-            <a:r>
-              <a:rPr lang="de-DE" dirty="0" err="1"/>
-              <a:t>Sequence</a:t>
-            </a:r>
-            <a:r>
-              <a:rPr lang="de-DE" dirty="0"/>
-              <a:t>/</a:t>
-            </a:r>
-            <a:r>
-              <a:rPr lang="de-DE" dirty="0" err="1"/>
-              <a:t>trajectory</a:t>
-            </a:r>
-            <a:r>
-              <a:rPr lang="de-DE" dirty="0"/>
-              <a:t> </a:t>
-            </a:r>
-            <a:r>
-              <a:rPr lang="de-DE" dirty="0" err="1"/>
-              <a:t>modeling</a:t>
-            </a:r>
-            <a:r>
-              <a:rPr lang="de-DE" dirty="0"/>
-              <a:t> (</a:t>
-            </a:r>
-            <a:r>
-              <a:rPr lang="de-DE" dirty="0" err="1"/>
-              <a:t>Decision</a:t>
-            </a:r>
-            <a:r>
-              <a:rPr lang="de-DE" dirty="0"/>
-              <a:t> Transformer, </a:t>
-            </a:r>
-            <a:r>
-              <a:rPr lang="de-DE" dirty="0" err="1"/>
-              <a:t>diffusion</a:t>
-            </a:r>
-            <a:r>
-              <a:rPr lang="de-DE" dirty="0"/>
-              <a:t> </a:t>
-            </a:r>
-            <a:r>
-              <a:rPr lang="de-DE" dirty="0" err="1"/>
-              <a:t>models</a:t>
-            </a:r>
-            <a:r>
-              <a:rPr lang="de-DE" dirty="0"/>
-              <a:t> </a:t>
-            </a:r>
-            <a:r>
-              <a:rPr lang="de-DE" dirty="0" err="1"/>
-              <a:t>for</a:t>
-            </a:r>
-            <a:r>
-              <a:rPr lang="de-DE" dirty="0"/>
-              <a:t> </a:t>
-            </a:r>
-            <a:r>
-              <a:rPr lang="de-DE" dirty="0" err="1"/>
-              <a:t>policies</a:t>
-            </a:r>
-            <a:r>
-              <a:rPr lang="de-DE" dirty="0"/>
-              <a:t>)</a:t>
-            </a:r>
-          </a:p>
-          <a:p>
-            <a:r>
-              <a:rPr lang="de-DE" dirty="0"/>
-              <a:t>Vision-</a:t>
-            </a:r>
-            <a:r>
-              <a:rPr lang="de-DE" dirty="0" err="1"/>
-              <a:t>language</a:t>
-            </a:r>
-            <a:r>
-              <a:rPr lang="de-DE" dirty="0"/>
-              <a:t>-action </a:t>
-            </a:r>
-            <a:r>
-              <a:rPr lang="de-DE" dirty="0" err="1"/>
-              <a:t>models</a:t>
-            </a:r>
-            <a:endParaRPr lang="de-DE" dirty="0"/>
-          </a:p>
-          <a:p>
-            <a:pPr lvl="1"/>
-            <a:r>
-              <a:rPr lang="de-DE" dirty="0"/>
-              <a:t>Vision </a:t>
-            </a:r>
-            <a:r>
-              <a:rPr lang="de-DE" dirty="0" err="1"/>
-              <a:t>encoders</a:t>
-            </a:r>
-            <a:r>
-              <a:rPr lang="de-DE" dirty="0"/>
-              <a:t> (</a:t>
-            </a:r>
-            <a:r>
-              <a:rPr lang="de-DE" dirty="0" err="1"/>
-              <a:t>ResNet</a:t>
-            </a:r>
-            <a:r>
-              <a:rPr lang="de-DE" dirty="0"/>
-              <a:t>, </a:t>
-            </a:r>
-            <a:r>
-              <a:rPr lang="de-DE" dirty="0" err="1"/>
-              <a:t>ViT</a:t>
-            </a:r>
-            <a:r>
-              <a:rPr lang="de-DE" dirty="0"/>
-              <a:t>)</a:t>
-            </a:r>
-          </a:p>
-          <a:p>
-            <a:pPr lvl="1"/>
-            <a:r>
-              <a:rPr lang="de-DE" dirty="0"/>
-              <a:t>Language </a:t>
-            </a:r>
-            <a:r>
-              <a:rPr lang="de-DE" dirty="0" err="1"/>
-              <a:t>models</a:t>
-            </a:r>
-            <a:r>
-              <a:rPr lang="de-DE" dirty="0"/>
-              <a:t> (</a:t>
-            </a:r>
-            <a:r>
-              <a:rPr lang="de-DE" dirty="0" err="1"/>
-              <a:t>side</a:t>
-            </a:r>
-            <a:r>
-              <a:rPr lang="de-DE" dirty="0"/>
-              <a:t> </a:t>
-            </a:r>
-            <a:r>
-              <a:rPr lang="de-DE" dirty="0" err="1"/>
-              <a:t>note</a:t>
-            </a:r>
-            <a:r>
-              <a:rPr lang="de-DE" dirty="0"/>
-              <a:t>: RLHF </a:t>
-            </a:r>
-            <a:r>
-              <a:rPr lang="de-DE" dirty="0" err="1"/>
-              <a:t>for</a:t>
-            </a:r>
-            <a:r>
-              <a:rPr lang="de-DE" dirty="0"/>
-              <a:t> LLM post-training)</a:t>
-            </a:r>
-          </a:p>
-          <a:p>
-            <a:pPr lvl="1"/>
-            <a:r>
-              <a:rPr lang="de-DE" dirty="0"/>
-              <a:t>Multimodal </a:t>
-            </a:r>
-            <a:r>
-              <a:rPr lang="de-DE" dirty="0" err="1"/>
-              <a:t>fusion</a:t>
-            </a:r>
-            <a:endParaRPr lang="de-DE" dirty="0"/>
-          </a:p>
-          <a:p>
-            <a:pPr lvl="1"/>
-            <a:r>
-              <a:rPr lang="de-DE" dirty="0" err="1"/>
-              <a:t>Tokenization</a:t>
-            </a:r>
-            <a:r>
-              <a:rPr lang="de-DE" dirty="0"/>
-              <a:t> </a:t>
-            </a:r>
-            <a:r>
-              <a:rPr lang="de-DE" dirty="0" err="1"/>
-              <a:t>of</a:t>
-            </a:r>
-            <a:r>
-              <a:rPr lang="de-DE" dirty="0"/>
-              <a:t> </a:t>
-            </a:r>
-            <a:r>
-              <a:rPr lang="de-DE" dirty="0" err="1"/>
-              <a:t>sensorimotor</a:t>
-            </a:r>
-            <a:r>
-              <a:rPr lang="de-DE" dirty="0"/>
-              <a:t> </a:t>
-            </a:r>
-            <a:r>
-              <a:rPr lang="de-DE" dirty="0" err="1"/>
-              <a:t>sequences</a:t>
-            </a:r>
-            <a:endParaRPr lang="de-DE" dirty="0"/>
-          </a:p>
-        </p:txBody>
-      </p:sp>
-      <p:sp>
-        <p:nvSpPr>
-          <p:cNvPr id="4" name="Foliennummernplatzhalter 3">
-            <a:extLst>
-              <a:ext uri="{FF2B5EF4-FFF2-40B4-BE49-F238E27FC236}">
-                <a16:creationId xmlns:a16="http://schemas.microsoft.com/office/drawing/2014/main" id="{C2BA8F83-5EF2-341E-9942-5EE099C574E6}"/>
-              </a:ext>
-            </a:extLst>
-          </p:cNvPr>
-          <p:cNvSpPr>
-            <a:spLocks noGrp="1"/>
-          </p:cNvSpPr>
-          <p:nvPr>
-            <p:ph type="sldNum" sz="quarter" idx="12"/>
-          </p:nvPr>
-        </p:nvSpPr>
-        <p:spPr/>
-        <p:txBody>
-          <a:bodyPr/>
-          <a:lstStyle/>
-          <a:p>
-            <a:fld id="{08C366F5-AFAD-49CB-854A-9D9E238FCA13}" type="slidenum">
-              <a:rPr lang="en-GB" smtClean="0"/>
-              <a:t>3</a:t>
-            </a:fld>
-            <a:endParaRPr lang="en-GB"/>
-          </a:p>
-        </p:txBody>
-      </p:sp>
-    </p:spTree>
-    <p:extLst>
-      <p:ext uri="{BB962C8B-B14F-4D97-AF65-F5344CB8AC3E}">
-        <p14:creationId xmlns:p14="http://schemas.microsoft.com/office/powerpoint/2010/main" val="1960105798"/>
-      </p:ext>
-    </p:extLst>
-  </p:cSld>
-  <p:clrMapOvr>
-    <a:masterClrMapping/>
-  </p:clrMapOvr>
-</p:sld>
-</file>
-
-<file path=ppt/slides/slide4.xml><?xml version="1.0" encoding="utf-8"?>
-<p:sld xmlns:a="http://schemas.openxmlformats.org/drawingml/2006/main" xmlns:r="http://schemas.openxmlformats.org/officeDocument/2006/relationships" xmlns:p="http://schemas.openxmlformats.org/presentationml/2006/main">
-  <p:cSld>
-    <p:spTree>
-      <p:nvGrpSpPr>
-        <p:cNvPr id="1" name=""/>
-        <p:cNvGrpSpPr/>
-        <p:nvPr/>
-      </p:nvGrpSpPr>
-      <p:grpSpPr>
-        <a:xfrm>
-          <a:off x="0" y="0"/>
-          <a:ext cx="0" cy="0"/>
-          <a:chOff x="0" y="0"/>
-          <a:chExt cx="0" cy="0"/>
-        </a:xfrm>
-      </p:grpSpPr>
       <p:pic>
         <p:nvPicPr>
           <p:cNvPr id="6" name="Picture 5" descr="A screenshot of a computer&#10;&#10;Description automatically generated with medium confidence">
@@ -4868,7 +4578,7 @@
           <a:p>
             <a:fld id="{384C2C1F-BED8-2340-8784-C66D22CCFBBD}" type="slidenum">
               <a:rPr lang="en-DE" smtClean="0"/>
-              <a:t>4</a:t>
+              <a:t>3</a:t>
             </a:fld>
             <a:endParaRPr lang="en-DE"/>
           </a:p>
@@ -5292,7 +5002,7 @@
 </p:sld>
 </file>
 
-<file path=ppt/slides/slide5.xml><?xml version="1.0" encoding="utf-8"?>
+<file path=ppt/slides/slide4.xml><?xml version="1.0" encoding="utf-8"?>
 <p:sld xmlns:a="http://schemas.openxmlformats.org/drawingml/2006/main" xmlns:r="http://schemas.openxmlformats.org/officeDocument/2006/relationships" xmlns:p="http://schemas.openxmlformats.org/presentationml/2006/main">
   <p:cSld>
     <p:spTree>
@@ -5416,7 +5126,7 @@
           <a:p>
             <a:fld id="{C48B675A-2084-C34A-84F6-1B6A8516A5F3}" type="slidenum">
               <a:rPr lang="en-DE" smtClean="0"/>
-              <a:t>5</a:t>
+              <a:t>4</a:t>
             </a:fld>
             <a:endParaRPr lang="en-DE"/>
           </a:p>
@@ -5699,7 +5409,7 @@
 </p:sld>
 </file>
 
-<file path=ppt/slides/slide6.xml><?xml version="1.0" encoding="utf-8"?>
+<file path=ppt/slides/slide5.xml><?xml version="1.0" encoding="utf-8"?>
 <p:sld xmlns:a="http://schemas.openxmlformats.org/drawingml/2006/main" xmlns:r="http://schemas.openxmlformats.org/officeDocument/2006/relationships" xmlns:p="http://schemas.openxmlformats.org/presentationml/2006/main">
   <p:cSld>
     <p:spTree>
@@ -5897,7 +5607,7 @@
           <a:p>
             <a:fld id="{C48B675A-2084-C34A-84F6-1B6A8516A5F3}" type="slidenum">
               <a:rPr lang="en-DE" smtClean="0"/>
-              <a:t>6</a:t>
+              <a:t>5</a:t>
             </a:fld>
             <a:endParaRPr lang="en-DE"/>
           </a:p>
@@ -6137,7 +5847,7 @@
 </p:sld>
 </file>
 
-<file path=ppt/slides/slide7.xml><?xml version="1.0" encoding="utf-8"?>
+<file path=ppt/slides/slide6.xml><?xml version="1.0" encoding="utf-8"?>
 <p:sld xmlns:a="http://schemas.openxmlformats.org/drawingml/2006/main" xmlns:r="http://schemas.openxmlformats.org/officeDocument/2006/relationships" xmlns:p="http://schemas.openxmlformats.org/presentationml/2006/main">
   <p:cSld>
     <p:spTree>
@@ -6235,7 +5945,7 @@
           <a:p>
             <a:fld id="{C48B675A-2084-C34A-84F6-1B6A8516A5F3}" type="slidenum">
               <a:rPr lang="en-DE" smtClean="0"/>
-              <a:t>7</a:t>
+              <a:t>6</a:t>
             </a:fld>
             <a:endParaRPr lang="en-DE"/>
           </a:p>
@@ -6367,6 +6077,345 @@
     <p:extLst>
       <p:ext uri="{BB962C8B-B14F-4D97-AF65-F5344CB8AC3E}">
         <p14:creationId xmlns:p14="http://schemas.microsoft.com/office/powerpoint/2010/main" val="4032294120"/>
+      </p:ext>
+    </p:extLst>
+  </p:cSld>
+  <p:clrMapOvr>
+    <a:masterClrMapping/>
+  </p:clrMapOvr>
+</p:sld>
+</file>
+
+<file path=ppt/slides/slide7.xml><?xml version="1.0" encoding="utf-8"?>
+<p:sld xmlns:a="http://schemas.openxmlformats.org/drawingml/2006/main" xmlns:r="http://schemas.openxmlformats.org/officeDocument/2006/relationships" xmlns:p="http://schemas.openxmlformats.org/presentationml/2006/main">
+  <p:cSld>
+    <p:spTree>
+      <p:nvGrpSpPr>
+        <p:cNvPr id="1" name="">
+          <a:extLst>
+            <a:ext uri="{FF2B5EF4-FFF2-40B4-BE49-F238E27FC236}">
+              <a16:creationId xmlns:a16="http://schemas.microsoft.com/office/drawing/2014/main" id="{A3E69027-781C-2360-A8C2-4D09CCE62358}"/>
+            </a:ext>
+          </a:extLst>
+        </p:cNvPr>
+        <p:cNvGrpSpPr/>
+        <p:nvPr/>
+      </p:nvGrpSpPr>
+      <p:grpSpPr>
+        <a:xfrm>
+          <a:off x="0" y="0"/>
+          <a:ext cx="0" cy="0"/>
+          <a:chOff x="0" y="0"/>
+          <a:chExt cx="0" cy="0"/>
+        </a:xfrm>
+      </p:grpSpPr>
+      <p:sp>
+        <p:nvSpPr>
+          <p:cNvPr id="2" name="Title 1">
+            <a:extLst>
+              <a:ext uri="{FF2B5EF4-FFF2-40B4-BE49-F238E27FC236}">
+                <a16:creationId xmlns:a16="http://schemas.microsoft.com/office/drawing/2014/main" id="{B59D3AD9-C7C4-0C91-D356-AC7281A3857B}"/>
+              </a:ext>
+            </a:extLst>
+          </p:cNvPr>
+          <p:cNvSpPr>
+            <a:spLocks noGrp="1"/>
+          </p:cNvSpPr>
+          <p:nvPr>
+            <p:ph type="title"/>
+          </p:nvPr>
+        </p:nvSpPr>
+        <p:spPr/>
+        <p:txBody>
+          <a:bodyPr/>
+          <a:lstStyle/>
+          <a:p>
+            <a:r>
+              <a:rPr lang="en-GB" dirty="0"/>
+              <a:t>Upside–Down RL</a:t>
+            </a:r>
+            <a:endParaRPr lang="en-DE" dirty="0"/>
+          </a:p>
+        </p:txBody>
+      </p:sp>
+      <p:sp>
+        <p:nvSpPr>
+          <p:cNvPr id="9" name="Inhaltsplatzhalter 8">
+            <a:extLst>
+              <a:ext uri="{FF2B5EF4-FFF2-40B4-BE49-F238E27FC236}">
+                <a16:creationId xmlns:a16="http://schemas.microsoft.com/office/drawing/2014/main" id="{344E1C86-3E59-C88F-5647-AC30A4335530}"/>
+              </a:ext>
+            </a:extLst>
+          </p:cNvPr>
+          <p:cNvSpPr>
+            <a:spLocks noGrp="1"/>
+          </p:cNvSpPr>
+          <p:nvPr>
+            <p:ph idx="1"/>
+          </p:nvPr>
+        </p:nvSpPr>
+        <p:spPr>
+          <a:xfrm>
+            <a:off x="838200" y="1825625"/>
+            <a:ext cx="7376142" cy="4351338"/>
+          </a:xfrm>
+        </p:spPr>
+        <p:txBody>
+          <a:bodyPr/>
+          <a:lstStyle/>
+          <a:p>
+            <a:pPr marL="0" indent="0">
+              <a:buNone/>
+            </a:pPr>
+            <a:r>
+              <a:rPr lang="en-GB" dirty="0"/>
+              <a:t>alternative to conventional RL</a:t>
+            </a:r>
+          </a:p>
+          <a:p>
+            <a:pPr marL="0" indent="0">
+              <a:buNone/>
+            </a:pPr>
+            <a:r>
+              <a:rPr lang="en-GB" dirty="0">
+                <a:sym typeface="Wingdings" pitchFamily="2" charset="2"/>
+              </a:rPr>
+              <a:t> </a:t>
+            </a:r>
+            <a:r>
+              <a:rPr lang="en-GB" dirty="0"/>
+              <a:t>n</a:t>
+            </a:r>
+            <a:r>
+              <a:rPr lang="en-DE"/>
+              <a:t>o bootstrapping</a:t>
+            </a:r>
+            <a:r>
+              <a:rPr lang="en-GB" dirty="0"/>
+              <a:t>, just supervised learning with “command” features (hindsight return in training, kind of prompt in inference)</a:t>
+            </a:r>
+          </a:p>
+        </p:txBody>
+      </p:sp>
+      <p:sp>
+        <p:nvSpPr>
+          <p:cNvPr id="4" name="Slide Number Placeholder 3">
+            <a:extLst>
+              <a:ext uri="{FF2B5EF4-FFF2-40B4-BE49-F238E27FC236}">
+                <a16:creationId xmlns:a16="http://schemas.microsoft.com/office/drawing/2014/main" id="{9003EB67-62E5-2FEF-07DD-A78ED719E45B}"/>
+              </a:ext>
+            </a:extLst>
+          </p:cNvPr>
+          <p:cNvSpPr>
+            <a:spLocks noGrp="1"/>
+          </p:cNvSpPr>
+          <p:nvPr>
+            <p:ph type="sldNum" sz="quarter" idx="12"/>
+          </p:nvPr>
+        </p:nvSpPr>
+        <p:spPr/>
+        <p:txBody>
+          <a:bodyPr/>
+          <a:lstStyle/>
+          <a:p>
+            <a:fld id="{384C2C1F-BED8-2340-8784-C66D22CCFBBD}" type="slidenum">
+              <a:rPr lang="en-DE" smtClean="0"/>
+              <a:t>7</a:t>
+            </a:fld>
+            <a:endParaRPr lang="en-DE"/>
+          </a:p>
+        </p:txBody>
+      </p:sp>
+      <p:pic>
+        <p:nvPicPr>
+          <p:cNvPr id="6" name="Picture 5" descr="Diagram&#10;&#10;Description automatically generated">
+            <a:extLst>
+              <a:ext uri="{FF2B5EF4-FFF2-40B4-BE49-F238E27FC236}">
+                <a16:creationId xmlns:a16="http://schemas.microsoft.com/office/drawing/2014/main" id="{3E1982DB-D5F9-A15D-0A97-D110371A4BAF}"/>
+              </a:ext>
+            </a:extLst>
+          </p:cNvPr>
+          <p:cNvPicPr>
+            <a:picLocks noChangeAspect="1"/>
+          </p:cNvPicPr>
+          <p:nvPr/>
+        </p:nvPicPr>
+        <p:blipFill>
+          <a:blip r:embed="rId2"/>
+          <a:stretch>
+            <a:fillRect/>
+          </a:stretch>
+        </p:blipFill>
+        <p:spPr>
+          <a:xfrm>
+            <a:off x="688717" y="4286157"/>
+            <a:ext cx="6435612" cy="2475721"/>
+          </a:xfrm>
+          <a:prstGeom prst="rect">
+            <a:avLst/>
+          </a:prstGeom>
+        </p:spPr>
+      </p:pic>
+      <p:sp>
+        <p:nvSpPr>
+          <p:cNvPr id="5" name="TextBox 4">
+            <a:extLst>
+              <a:ext uri="{FF2B5EF4-FFF2-40B4-BE49-F238E27FC236}">
+                <a16:creationId xmlns:a16="http://schemas.microsoft.com/office/drawing/2014/main" id="{A2BDBF69-4248-E002-D8D4-9B7638A2934A}"/>
+              </a:ext>
+            </a:extLst>
+          </p:cNvPr>
+          <p:cNvSpPr txBox="1"/>
+          <p:nvPr/>
+        </p:nvSpPr>
+        <p:spPr>
+          <a:xfrm>
+            <a:off x="6328064" y="6492875"/>
+            <a:ext cx="565605" cy="246221"/>
+          </a:xfrm>
+          <a:prstGeom prst="rect">
+            <a:avLst/>
+          </a:prstGeom>
+          <a:noFill/>
+        </p:spPr>
+        <p:txBody>
+          <a:bodyPr wrap="square" rtlCol="0">
+            <a:spAutoFit/>
+          </a:bodyPr>
+          <a:lstStyle/>
+          <a:p>
+            <a:r>
+              <a:rPr lang="de-DE" sz="1000" dirty="0">
+                <a:hlinkClick r:id="rId3"/>
+              </a:rPr>
+              <a:t>source</a:t>
+            </a:r>
+            <a:endParaRPr lang="de-DE" sz="1000" dirty="0"/>
+          </a:p>
+        </p:txBody>
+      </p:sp>
+      <p:sp>
+        <p:nvSpPr>
+          <p:cNvPr id="8" name="TextBox 7">
+            <a:extLst>
+              <a:ext uri="{FF2B5EF4-FFF2-40B4-BE49-F238E27FC236}">
+                <a16:creationId xmlns:a16="http://schemas.microsoft.com/office/drawing/2014/main" id="{EA7F40D3-B6C6-7300-BDC4-ABC9845613EE}"/>
+              </a:ext>
+            </a:extLst>
+          </p:cNvPr>
+          <p:cNvSpPr txBox="1"/>
+          <p:nvPr/>
+        </p:nvSpPr>
+        <p:spPr>
+          <a:xfrm>
+            <a:off x="7471719" y="4708409"/>
+            <a:ext cx="4678892" cy="1631216"/>
+          </a:xfrm>
+          <a:prstGeom prst="rect">
+            <a:avLst/>
+          </a:prstGeom>
+          <a:noFill/>
+        </p:spPr>
+        <p:txBody>
+          <a:bodyPr wrap="square" rtlCol="0">
+            <a:spAutoFit/>
+          </a:bodyPr>
+          <a:lstStyle/>
+          <a:p>
+            <a:r>
+              <a:rPr lang="en-GB" sz="2000" dirty="0"/>
+              <a:t>But policy improvement (i.e., higher return) beyond training examples (extrapolation) usually still requires policy iteration (here: iteratively updated trainings with new data with higher returns).</a:t>
+            </a:r>
+          </a:p>
+        </p:txBody>
+      </p:sp>
+      <p:sp>
+        <p:nvSpPr>
+          <p:cNvPr id="7" name="TextBox 6">
+            <a:extLst>
+              <a:ext uri="{FF2B5EF4-FFF2-40B4-BE49-F238E27FC236}">
+                <a16:creationId xmlns:a16="http://schemas.microsoft.com/office/drawing/2014/main" id="{00365428-88B3-18A0-A359-D29654D90FD5}"/>
+              </a:ext>
+            </a:extLst>
+          </p:cNvPr>
+          <p:cNvSpPr txBox="1"/>
+          <p:nvPr/>
+        </p:nvSpPr>
+        <p:spPr>
+          <a:xfrm>
+            <a:off x="8956964" y="2162545"/>
+            <a:ext cx="3193647" cy="1323439"/>
+          </a:xfrm>
+          <a:prstGeom prst="rect">
+            <a:avLst/>
+          </a:prstGeom>
+          <a:noFill/>
+          <a:ln>
+            <a:solidFill>
+              <a:schemeClr val="tx1"/>
+            </a:solidFill>
+          </a:ln>
+        </p:spPr>
+        <p:txBody>
+          <a:bodyPr wrap="square" rtlCol="0">
+            <a:spAutoFit/>
+          </a:bodyPr>
+          <a:lstStyle/>
+          <a:p>
+            <a:r>
+              <a:rPr lang="en-GB" sz="2000" dirty="0"/>
+              <a:t>offline RL: no interaction with environment, just fixed data set of trajectory rollouts of arbitrary policies</a:t>
+            </a:r>
+          </a:p>
+        </p:txBody>
+      </p:sp>
+      <p:cxnSp>
+        <p:nvCxnSpPr>
+          <p:cNvPr id="10" name="Straight Arrow Connector 9">
+            <a:extLst>
+              <a:ext uri="{FF2B5EF4-FFF2-40B4-BE49-F238E27FC236}">
+                <a16:creationId xmlns:a16="http://schemas.microsoft.com/office/drawing/2014/main" id="{68F68E9E-D7BF-6127-6A50-B7CCF0CA1C8F}"/>
+              </a:ext>
+            </a:extLst>
+          </p:cNvPr>
+          <p:cNvCxnSpPr>
+            <a:cxnSpLocks/>
+            <a:stCxn id="7" idx="2"/>
+            <a:endCxn id="8" idx="0"/>
+          </p:cNvCxnSpPr>
+          <p:nvPr/>
+        </p:nvCxnSpPr>
+        <p:spPr>
+          <a:xfrm flipH="1">
+            <a:off x="9811165" y="3485984"/>
+            <a:ext cx="742623" cy="1222425"/>
+          </a:xfrm>
+          <a:prstGeom prst="straightConnector1">
+            <a:avLst/>
+          </a:prstGeom>
+          <a:ln>
+            <a:tailEnd type="triangle"/>
+          </a:ln>
+        </p:spPr>
+        <p:style>
+          <a:lnRef idx="1">
+            <a:schemeClr val="accent1"/>
+          </a:lnRef>
+          <a:fillRef idx="0">
+            <a:schemeClr val="accent1"/>
+          </a:fillRef>
+          <a:effectRef idx="0">
+            <a:schemeClr val="accent1"/>
+          </a:effectRef>
+          <a:fontRef idx="minor">
+            <a:schemeClr val="tx1"/>
+          </a:fontRef>
+        </p:style>
+      </p:cxnSp>
+    </p:spTree>
+    <p:extLst>
+      <p:ext uri="{BB962C8B-B14F-4D97-AF65-F5344CB8AC3E}">
+        <p14:creationId xmlns:p14="http://schemas.microsoft.com/office/powerpoint/2010/main" val="2629763429"/>
       </p:ext>
     </p:extLst>
   </p:cSld>
